--- a/DS_4_Rushay/Week_4/Data_Science_Final_PPT_Rushay_Gopani_2.pptx
+++ b/DS_4_Rushay/Week_4/Data_Science_Final_PPT_Rushay_Gopani_2.pptx
@@ -5615,7 +5615,7 @@
         <p:spPr>
           <a:xfrm>
             <a:off x="192838" y="2773181"/>
-            <a:ext cx="5110681" cy="923330"/>
+            <a:ext cx="5110681" cy="646331"/>
           </a:xfrm>
           <a:prstGeom prst="rect">
             <a:avLst/>
@@ -5658,16 +5658,6 @@
                 </a:solidFill>
               </a:rPr>
               <a:t>			     Anurag Chawla || Maya</a:t>
-            </a:r>
-          </a:p>
-          <a:p>
-            <a:r>
-              <a:rPr lang="en-IN" dirty="0">
-                <a:solidFill>
-                  <a:schemeClr val="bg1"/>
-                </a:solidFill>
-              </a:rPr>
-              <a:t>			     Ajay</a:t>
             </a:r>
           </a:p>
         </p:txBody>
@@ -12467,7 +12457,13 @@
       </p:sp>
       <p:pic>
         <p:nvPicPr>
-          <p:cNvPr id="25" name="Image 0" descr="preencoded.png"/>
+          <p:cNvPr id="27" name="Picture 26">
+            <a:extLst>
+              <a:ext uri="{FF2B5EF4-FFF2-40B4-BE49-F238E27FC236}">
+                <a16:creationId xmlns:a16="http://schemas.microsoft.com/office/drawing/2014/main" id="{F7A8333C-C8C1-9470-9DE6-BCBB7140F945}"/>
+              </a:ext>
+            </a:extLst>
+          </p:cNvPr>
           <p:cNvPicPr>
             <a:picLocks noChangeAspect="1"/>
           </p:cNvPicPr>
@@ -12475,13 +12471,14 @@
         </p:nvPicPr>
         <p:blipFill>
           <a:blip r:embed="rId3"/>
-          <a:srcRect/>
-          <a:stretch/>
+          <a:stretch>
+            <a:fillRect/>
+          </a:stretch>
         </p:blipFill>
         <p:spPr>
           <a:xfrm>
-            <a:off x="274320" y="2274243"/>
-            <a:ext cx="5303520" cy="2676580"/>
+            <a:off x="223375" y="2350008"/>
+            <a:ext cx="3873137" cy="2687030"/>
           </a:xfrm>
           <a:prstGeom prst="rect">
             <a:avLst/>
@@ -12490,7 +12487,13 @@
       </p:pic>
       <p:pic>
         <p:nvPicPr>
-          <p:cNvPr id="26" name="Image 1" descr="preencoded.png"/>
+          <p:cNvPr id="29" name="Picture 28">
+            <a:extLst>
+              <a:ext uri="{FF2B5EF4-FFF2-40B4-BE49-F238E27FC236}">
+                <a16:creationId xmlns:a16="http://schemas.microsoft.com/office/drawing/2014/main" id="{D6742221-CF66-4964-2704-2AB967901C24}"/>
+              </a:ext>
+            </a:extLst>
+          </p:cNvPr>
           <p:cNvPicPr>
             <a:picLocks noChangeAspect="1"/>
           </p:cNvPicPr>
@@ -12498,13 +12501,44 @@
         </p:nvPicPr>
         <p:blipFill>
           <a:blip r:embed="rId4"/>
-          <a:srcRect/>
-          <a:stretch/>
+          <a:stretch>
+            <a:fillRect/>
+          </a:stretch>
         </p:blipFill>
         <p:spPr>
           <a:xfrm>
-            <a:off x="5584371" y="2571750"/>
-            <a:ext cx="3383280" cy="2377440"/>
+            <a:off x="4096512" y="2351967"/>
+            <a:ext cx="4932337" cy="1095321"/>
+          </a:xfrm>
+          <a:prstGeom prst="rect">
+            <a:avLst/>
+          </a:prstGeom>
+        </p:spPr>
+      </p:pic>
+      <p:pic>
+        <p:nvPicPr>
+          <p:cNvPr id="31" name="Picture 30">
+            <a:extLst>
+              <a:ext uri="{FF2B5EF4-FFF2-40B4-BE49-F238E27FC236}">
+                <a16:creationId xmlns:a16="http://schemas.microsoft.com/office/drawing/2014/main" id="{521CC26E-B471-6A05-297C-ED913D7013BA}"/>
+              </a:ext>
+            </a:extLst>
+          </p:cNvPr>
+          <p:cNvPicPr>
+            <a:picLocks noChangeAspect="1"/>
+          </p:cNvPicPr>
+          <p:nvPr/>
+        </p:nvPicPr>
+        <p:blipFill>
+          <a:blip r:embed="rId5"/>
+          <a:stretch>
+            <a:fillRect/>
+          </a:stretch>
+        </p:blipFill>
+        <p:spPr>
+          <a:xfrm>
+            <a:off x="4096512" y="3447289"/>
+            <a:ext cx="4932338" cy="1589750"/>
           </a:xfrm>
           <a:prstGeom prst="rect">
             <a:avLst/>
